--- a/public/downloads/US-114051-L2-Preparing-the-Meeting.pptx
+++ b/public/downloads/US-114051-L2-Preparing-the-Meeting.pptx
@@ -12,9 +12,11 @@
     <p:sldId id="260" r:id="rId6"/>
     <p:sldId id="261" r:id="rId7"/>
     <p:sldId id="262" r:id="rId8"/>
+    <p:sldId id="263" r:id="rId9"/>
+    <p:sldId id="264" r:id="rId10"/>
   </p:sldIdLst>
   <p:notesMasterIdLst>
-    <p:notesMasterId r:id="rId9"/>
+    <p:notesMasterId r:id="rId11"/>
   </p:notesMasterIdLst>
   <p:sldSz cx="12188952" cy="6858000"/>
   <p:notesSz cx="6858000" cy="12188952"/>
@@ -1060,6 +1062,182 @@
             <a:fld id="{F7021451-1387-4CA6-816F-3879F97B5CBC}" type="slidenum">
               <a:rPr lang="en-US"/>
               <a:t>7</a:t>
+            </a:fld>
+            <a:endParaRPr lang="en-US"/>
+          </a:p>
+        </p:txBody>
+      </p:sp>
+    </p:spTree>
+    <p:extLst>
+      <p:ext uri="{BB962C8B-B14F-4D97-AF65-F5344CB8AC3E}">
+        <p14:creationId xmlns:p14="http://schemas.microsoft.com/office/powerpoint/2010/main" val="1024086991"/>
+      </p:ext>
+    </p:extLst>
+  </p:cSld>
+  <p:clrMapOvr>
+    <a:masterClrMapping/>
+  </p:clrMapOvr>
+</p:notes>
+</file>
+
+<file path=ppt/notesSlides/notesSlide8.xml><?xml version="1.0" encoding="utf-8"?>
+<p:notes xmlns:a="http://schemas.openxmlformats.org/drawingml/2006/main" xmlns:r="http://schemas.openxmlformats.org/officeDocument/2006/relationships" xmlns:p="http://schemas.openxmlformats.org/presentationml/2006/main">
+  <p:cSld>
+    <p:spTree>
+      <p:nvGrpSpPr>
+        <p:cNvPr id="1" name=""/>
+        <p:cNvGrpSpPr/>
+        <p:nvPr/>
+      </p:nvGrpSpPr>
+      <p:grpSpPr>
+        <a:xfrm>
+          <a:off x="0" y="0"/>
+          <a:ext cx="0" cy="0"/>
+          <a:chOff x="0" y="0"/>
+          <a:chExt cx="0" cy="0"/>
+        </a:xfrm>
+      </p:grpSpPr>
+      <p:sp>
+        <p:nvSpPr>
+          <p:cNvPr id="2" name="Slide Image Placeholder 1"/>
+          <p:cNvSpPr>
+            <a:spLocks noGrp="1" noRot="1" noChangeAspect="1"/>
+          </p:cNvSpPr>
+          <p:nvPr>
+            <p:ph type="sldImg"/>
+          </p:nvPr>
+        </p:nvSpPr>
+        <p:spPr/>
+      </p:sp>
+      <p:sp>
+        <p:nvSpPr>
+          <p:cNvPr id="3" name="Notes Placeholder 2"/>
+          <p:cNvSpPr>
+            <a:spLocks noGrp="1"/>
+          </p:cNvSpPr>
+          <p:nvPr>
+            <p:ph type="body" idx="1"/>
+          </p:nvPr>
+        </p:nvSpPr>
+        <p:spPr/>
+        <p:txBody>
+          <a:bodyPr/>
+          <a:lstStyle/>
+          <a:p>
+            <a:r>
+              <a:rPr lang="en-US" dirty="0"/>
+              <a:t/>
+            </a:r>
+            <a:endParaRPr lang="en-US" dirty="0"/>
+          </a:p>
+        </p:txBody>
+      </p:sp>
+      <p:sp>
+        <p:nvSpPr>
+          <p:cNvPr id="4" name="Slide Number Placeholder 3"/>
+          <p:cNvSpPr>
+            <a:spLocks noGrp="1"/>
+          </p:cNvSpPr>
+          <p:nvPr>
+            <p:ph type="sldNum" sz="quarter" idx="10"/>
+          </p:nvPr>
+        </p:nvSpPr>
+        <p:spPr/>
+        <p:txBody>
+          <a:bodyPr/>
+          <a:lstStyle/>
+          <a:p>
+            <a:fld id="{F7021451-1387-4CA6-816F-3879F97B5CBC}" type="slidenum">
+              <a:rPr lang="en-US"/>
+              <a:t>8</a:t>
+            </a:fld>
+            <a:endParaRPr lang="en-US"/>
+          </a:p>
+        </p:txBody>
+      </p:sp>
+    </p:spTree>
+    <p:extLst>
+      <p:ext uri="{BB962C8B-B14F-4D97-AF65-F5344CB8AC3E}">
+        <p14:creationId xmlns:p14="http://schemas.microsoft.com/office/powerpoint/2010/main" val="1024086991"/>
+      </p:ext>
+    </p:extLst>
+  </p:cSld>
+  <p:clrMapOvr>
+    <a:masterClrMapping/>
+  </p:clrMapOvr>
+</p:notes>
+</file>
+
+<file path=ppt/notesSlides/notesSlide9.xml><?xml version="1.0" encoding="utf-8"?>
+<p:notes xmlns:a="http://schemas.openxmlformats.org/drawingml/2006/main" xmlns:r="http://schemas.openxmlformats.org/officeDocument/2006/relationships" xmlns:p="http://schemas.openxmlformats.org/presentationml/2006/main">
+  <p:cSld>
+    <p:spTree>
+      <p:nvGrpSpPr>
+        <p:cNvPr id="1" name=""/>
+        <p:cNvGrpSpPr/>
+        <p:nvPr/>
+      </p:nvGrpSpPr>
+      <p:grpSpPr>
+        <a:xfrm>
+          <a:off x="0" y="0"/>
+          <a:ext cx="0" cy="0"/>
+          <a:chOff x="0" y="0"/>
+          <a:chExt cx="0" cy="0"/>
+        </a:xfrm>
+      </p:grpSpPr>
+      <p:sp>
+        <p:nvSpPr>
+          <p:cNvPr id="2" name="Slide Image Placeholder 1"/>
+          <p:cNvSpPr>
+            <a:spLocks noGrp="1" noRot="1" noChangeAspect="1"/>
+          </p:cNvSpPr>
+          <p:nvPr>
+            <p:ph type="sldImg"/>
+          </p:nvPr>
+        </p:nvSpPr>
+        <p:spPr/>
+      </p:sp>
+      <p:sp>
+        <p:nvSpPr>
+          <p:cNvPr id="3" name="Notes Placeholder 2"/>
+          <p:cNvSpPr>
+            <a:spLocks noGrp="1"/>
+          </p:cNvSpPr>
+          <p:nvPr>
+            <p:ph type="body" idx="1"/>
+          </p:nvPr>
+        </p:nvSpPr>
+        <p:spPr/>
+        <p:txBody>
+          <a:bodyPr/>
+          <a:lstStyle/>
+          <a:p>
+            <a:r>
+              <a:rPr lang="en-US" dirty="0"/>
+              <a:t/>
+            </a:r>
+            <a:endParaRPr lang="en-US" dirty="0"/>
+          </a:p>
+        </p:txBody>
+      </p:sp>
+      <p:sp>
+        <p:nvSpPr>
+          <p:cNvPr id="4" name="Slide Number Placeholder 3"/>
+          <p:cNvSpPr>
+            <a:spLocks noGrp="1"/>
+          </p:cNvSpPr>
+          <p:nvPr>
+            <p:ph type="sldNum" sz="quarter" idx="10"/>
+          </p:nvPr>
+        </p:nvSpPr>
+        <p:spPr/>
+        <p:txBody>
+          <a:bodyPr/>
+          <a:lstStyle/>
+          <a:p>
+            <a:fld id="{F7021451-1387-4CA6-816F-3879F97B5CBC}" type="slidenum">
+              <a:rPr lang="en-US"/>
+              <a:t>9</a:t>
             </a:fld>
             <a:endParaRPr lang="en-US"/>
           </a:p>
@@ -1565,7 +1743,7 @@
                 <a:ea typeface="Aptos" pitchFamily="34" charset="-122"/>
                 <a:cs typeface="Aptos" pitchFamily="34" charset="-120"/>
               </a:rPr>
-              <a:t>Venue, facilities, technology and supporting information — with documented outcomes, timeous invitations and a distributed agenda</a:t>
+              <a:t>Venue, facilities, technology and supporting information — documented outcomes, timeous notification and an agenda built the right way</a:t>
             </a:r>
             <a:endParaRPr lang="en-US" sz="1900" dirty="0"/>
           </a:p>
@@ -2379,7 +2557,7 @@
                 <a:ea typeface="Aptos" pitchFamily="34" charset="-122"/>
                 <a:cs typeface="Aptos" pitchFamily="34" charset="-120"/>
               </a:rPr>
-              <a:t>Venue, facilities, technology and supporting information are in place.</a:t>
+              <a:t>Venue selection, facilities, technology required and relevant supporting information — relevant to the type of meeting.</a:t>
             </a:r>
             <a:endParaRPr lang="en-US" sz="1800" dirty="0"/>
           </a:p>
@@ -2675,7 +2853,7 @@
                 <a:ea typeface="Aptos" pitchFamily="34" charset="-122"/>
                 <a:cs typeface="Aptos" pitchFamily="34" charset="-120"/>
               </a:rPr>
-              <a:t>Participants are invited early enough to prepare and attend.</a:t>
+              <a:t>Meeting invitations are extended to relevant participants timeously.</a:t>
             </a:r>
             <a:endParaRPr lang="en-US" sz="1800" dirty="0"/>
           </a:p>
@@ -2823,7 +3001,7 @@
                 <a:ea typeface="Aptos" pitchFamily="34" charset="-122"/>
                 <a:cs typeface="Aptos" pitchFamily="34" charset="-120"/>
               </a:rPr>
-              <a:t>The agenda and supporting documentation are completed and distributed.</a:t>
+              <a:t>The agenda and other supporting documentation are completed and distributed.</a:t>
             </a:r>
             <a:endParaRPr lang="en-US" sz="1800" dirty="0"/>
           </a:p>
@@ -3073,7 +3251,7 @@
                 <a:ea typeface="Aptos" pitchFamily="34" charset="-122"/>
                 <a:cs typeface="Aptos" pitchFamily="34" charset="-120"/>
               </a:rPr>
-              <a:t>Preparation is where a meeting is won. Four arrangements must be in place before anyone walks in:</a:t>
+              <a:t>The outcome of a meeting is heavily dependent on the preparation and input into it. Four arrangements must be in place:</a:t>
             </a:r>
             <a:endParaRPr lang="en-US" sz="1800" dirty="0"/>
           </a:p>
@@ -3087,12 +3265,12 @@
         </p:nvSpPr>
         <p:spPr>
           <a:xfrm>
-            <a:off x="502920" y="1828800"/>
-            <a:ext cx="5500116" cy="1965960"/>
+            <a:off x="502920" y="1874520"/>
+            <a:ext cx="5500116" cy="2103120"/>
           </a:xfrm>
           <a:prstGeom prst="roundRect">
             <a:avLst>
-              <a:gd name="adj" fmla="val 4186"/>
+              <a:gd name="adj" fmla="val 3913"/>
             </a:avLst>
           </a:prstGeom>
           <a:solidFill>
@@ -3135,7 +3313,7 @@
         </p:blipFill>
         <p:spPr>
           <a:xfrm>
-            <a:off x="667512" y="2011680"/>
+            <a:off x="667512" y="2057400"/>
             <a:ext cx="347472" cy="347472"/>
           </a:xfrm>
           <a:prstGeom prst="rect">
@@ -3151,7 +3329,7 @@
         </p:nvSpPr>
         <p:spPr>
           <a:xfrm>
-            <a:off x="1106424" y="1938528"/>
+            <a:off x="1106424" y="1984248"/>
             <a:ext cx="4732020" cy="777240"/>
           </a:xfrm>
           <a:prstGeom prst="rect">
@@ -3179,7 +3357,7 @@
                 <a:ea typeface="Aptos Display" pitchFamily="34" charset="-122"/>
                 <a:cs typeface="Aptos Display" pitchFamily="34" charset="-120"/>
               </a:rPr>
-              <a:t>Venue</a:t>
+              <a:t>Venue selection</a:t>
             </a:r>
             <a:endParaRPr lang="en-US" sz="2000" dirty="0"/>
           </a:p>
@@ -3193,8 +3371,8 @@
         </p:nvSpPr>
         <p:spPr>
           <a:xfrm>
-            <a:off x="667512" y="2761488"/>
-            <a:ext cx="5170932" cy="905256"/>
+            <a:off x="667512" y="2807208"/>
+            <a:ext cx="5170932" cy="1042416"/>
           </a:xfrm>
           <a:prstGeom prst="rect">
             <a:avLst/>
@@ -3221,7 +3399,7 @@
                 <a:ea typeface="Aptos" pitchFamily="34" charset="-122"/>
                 <a:cs typeface="Aptos" pitchFamily="34" charset="-120"/>
               </a:rPr>
-              <a:t>Booked, accessible and set up for the meeting style — seating that lets practitioners face each other.</a:t>
+              <a:t>Size and interactive capability affect the outcome: participants who must move between groups need the space for it. The venue must be accessible, and located where participants will not be distracted.</a:t>
             </a:r>
             <a:endParaRPr lang="en-US" sz="1800" dirty="0"/>
           </a:p>
@@ -3235,12 +3413,12 @@
         </p:nvSpPr>
         <p:spPr>
           <a:xfrm>
-            <a:off x="6185916" y="1828800"/>
-            <a:ext cx="5500116" cy="1965960"/>
+            <a:off x="6185916" y="1874520"/>
+            <a:ext cx="5500116" cy="2103120"/>
           </a:xfrm>
           <a:prstGeom prst="roundRect">
             <a:avLst>
-              <a:gd name="adj" fmla="val 4186"/>
+              <a:gd name="adj" fmla="val 3913"/>
             </a:avLst>
           </a:prstGeom>
           <a:solidFill>
@@ -3283,7 +3461,7 @@
         </p:blipFill>
         <p:spPr>
           <a:xfrm>
-            <a:off x="6350508" y="2011680"/>
+            <a:off x="6350508" y="2057400"/>
             <a:ext cx="347472" cy="347472"/>
           </a:xfrm>
           <a:prstGeom prst="rect">
@@ -3299,7 +3477,7 @@
         </p:nvSpPr>
         <p:spPr>
           <a:xfrm>
-            <a:off x="6789420" y="1938528"/>
+            <a:off x="6789420" y="1984248"/>
             <a:ext cx="4732020" cy="777240"/>
           </a:xfrm>
           <a:prstGeom prst="rect">
@@ -3341,8 +3519,8 @@
         </p:nvSpPr>
         <p:spPr>
           <a:xfrm>
-            <a:off x="6350508" y="2761488"/>
-            <a:ext cx="5170932" cy="905256"/>
+            <a:off x="6350508" y="2807208"/>
+            <a:ext cx="5170932" cy="1042416"/>
           </a:xfrm>
           <a:prstGeom prst="rect">
             <a:avLst/>
@@ -3369,7 +3547,7 @@
                 <a:ea typeface="Aptos" pitchFamily="34" charset="-122"/>
                 <a:cs typeface="Aptos" pitchFamily="34" charset="-120"/>
               </a:rPr>
-              <a:t>Whiteboards, flip charts, stationery, refreshments — everything the discussion will need.</a:t>
+              <a:t>Driven by the meeting type, the outcome required and the resources used. Where resources need extra facilities, arrange their availability in advance.</a:t>
             </a:r>
             <a:endParaRPr lang="en-US" sz="1800" dirty="0"/>
           </a:p>
@@ -3383,12 +3561,12 @@
         </p:nvSpPr>
         <p:spPr>
           <a:xfrm>
-            <a:off x="502920" y="3977640"/>
-            <a:ext cx="5500116" cy="1965960"/>
+            <a:off x="502920" y="4160520"/>
+            <a:ext cx="5500116" cy="2103120"/>
           </a:xfrm>
           <a:prstGeom prst="roundRect">
             <a:avLst>
-              <a:gd name="adj" fmla="val 4186"/>
+              <a:gd name="adj" fmla="val 3913"/>
             </a:avLst>
           </a:prstGeom>
           <a:solidFill>
@@ -3431,7 +3609,7 @@
         </p:blipFill>
         <p:spPr>
           <a:xfrm>
-            <a:off x="667512" y="4160520"/>
+            <a:off x="667512" y="4343400"/>
             <a:ext cx="347472" cy="347472"/>
           </a:xfrm>
           <a:prstGeom prst="rect">
@@ -3447,7 +3625,7 @@
         </p:nvSpPr>
         <p:spPr>
           <a:xfrm>
-            <a:off x="1106424" y="4087368"/>
+            <a:off x="1106424" y="4270248"/>
             <a:ext cx="4732020" cy="777240"/>
           </a:xfrm>
           <a:prstGeom prst="rect">
@@ -3489,8 +3667,8 @@
         </p:nvSpPr>
         <p:spPr>
           <a:xfrm>
-            <a:off x="667512" y="4910328"/>
-            <a:ext cx="5170932" cy="905256"/>
+            <a:off x="667512" y="5093208"/>
+            <a:ext cx="5170932" cy="1042416"/>
           </a:xfrm>
           <a:prstGeom prst="rect">
             <a:avLst/>
@@ -3517,7 +3695,7 @@
                 <a:ea typeface="Aptos" pitchFamily="34" charset="-122"/>
                 <a:cs typeface="Aptos" pitchFamily="34" charset="-120"/>
               </a:rPr>
-              <a:t>Projector, video conferencing, network access — prepared and tested before the meeting starts.</a:t>
+              <a:t>If delegates must work online, the venue needs internet access; any equipment participants must use has to be made available — and tested.</a:t>
             </a:r>
             <a:endParaRPr lang="en-US" sz="1800" dirty="0"/>
           </a:p>
@@ -3531,12 +3709,12 @@
         </p:nvSpPr>
         <p:spPr>
           <a:xfrm>
-            <a:off x="6185916" y="3977640"/>
-            <a:ext cx="5500116" cy="1965960"/>
+            <a:off x="6185916" y="4160520"/>
+            <a:ext cx="5500116" cy="2103120"/>
           </a:xfrm>
           <a:prstGeom prst="roundRect">
             <a:avLst>
-              <a:gd name="adj" fmla="val 4186"/>
+              <a:gd name="adj" fmla="val 3913"/>
             </a:avLst>
           </a:prstGeom>
           <a:solidFill>
@@ -3579,7 +3757,7 @@
         </p:blipFill>
         <p:spPr>
           <a:xfrm>
-            <a:off x="6350508" y="4160520"/>
+            <a:off x="6350508" y="4343400"/>
             <a:ext cx="347472" cy="347472"/>
           </a:xfrm>
           <a:prstGeom prst="rect">
@@ -3595,7 +3773,7 @@
         </p:nvSpPr>
         <p:spPr>
           <a:xfrm>
-            <a:off x="6789420" y="4087368"/>
+            <a:off x="6789420" y="4270248"/>
             <a:ext cx="4732020" cy="777240"/>
           </a:xfrm>
           <a:prstGeom prst="rect">
@@ -3623,7 +3801,7 @@
                 <a:ea typeface="Aptos Display" pitchFamily="34" charset="-122"/>
                 <a:cs typeface="Aptos Display" pitchFamily="34" charset="-120"/>
               </a:rPr>
-              <a:t>Supporting information</a:t>
+              <a:t>Support information</a:t>
             </a:r>
             <a:endParaRPr lang="en-US" sz="2000" dirty="0"/>
           </a:p>
@@ -3637,8 +3815,8 @@
         </p:nvSpPr>
         <p:spPr>
           <a:xfrm>
-            <a:off x="6350508" y="4910328"/>
-            <a:ext cx="5170932" cy="905256"/>
+            <a:off x="6350508" y="5093208"/>
+            <a:ext cx="5170932" cy="1042416"/>
           </a:xfrm>
           <a:prstGeom prst="rect">
             <a:avLst/>
@@ -3665,7 +3843,7 @@
                 <a:ea typeface="Aptos" pitchFamily="34" charset="-122"/>
                 <a:cs typeface="Aptos" pitchFamily="34" charset="-120"/>
               </a:rPr>
-              <a:t>Reports, designs and data the discussion depends on — available to every participant.</a:t>
+              <a:t>User guides and additional information gathered by the organisation must be readily available to the presenter and participants.</a:t>
             </a:r>
             <a:endParaRPr lang="en-US" sz="1800" dirty="0"/>
           </a:p>
@@ -3873,7 +4051,7 @@
                 <a:ea typeface="Aptos Display" pitchFamily="34" charset="-122"/>
                 <a:cs typeface="Aptos Display" pitchFamily="34" charset="-120"/>
               </a:rPr>
-              <a:t>Outcomes and invitations</a:t>
+              <a:t>Notification — make the meeting easy to attend</a:t>
             </a:r>
             <a:endParaRPr lang="en-US" sz="3000" dirty="0"/>
           </a:p>
@@ -3881,87 +4059,14 @@
       </p:sp>
       <p:sp>
         <p:nvSpPr>
-          <p:cNvPr id="7" name="Shape 5"/>
+          <p:cNvPr id="7" name="Text 5"/>
           <p:cNvSpPr/>
           <p:nvPr/>
         </p:nvSpPr>
         <p:spPr>
           <a:xfrm>
             <a:off x="502920" y="1554480"/>
-            <a:ext cx="5454396" cy="4480560"/>
-          </a:xfrm>
-          <a:prstGeom prst="roundRect">
-            <a:avLst>
-              <a:gd name="adj" fmla="val 1837"/>
-            </a:avLst>
-          </a:prstGeom>
-          <a:solidFill>
-            <a:srgbClr val="FFFFFF"/>
-          </a:solidFill>
-          <a:ln w="12700">
-            <a:solidFill>
-              <a:srgbClr val="D5E3F2"/>
-            </a:solidFill>
-            <a:prstDash val="solid"/>
-          </a:ln>
-          <a:effectLst>
-            <a:outerShdw sx="100000" sy="100000" kx="0" ky="0" algn="bl" rotWithShape="0" blurRad="88900" dist="25400" dir="5400000">
-              <a:srgbClr val="9AB4CC">
-                <a:alpha val="30000"/>
-              </a:srgbClr>
-            </a:outerShdw>
-          </a:effectLst>
-        </p:spPr>
-      </p:sp>
-      <p:sp>
-        <p:nvSpPr>
-          <p:cNvPr id="8" name="Text 6"/>
-          <p:cNvSpPr/>
-          <p:nvPr/>
-        </p:nvSpPr>
-        <p:spPr>
-          <a:xfrm>
-            <a:off x="731520" y="1737360"/>
-            <a:ext cx="4997196" cy="329184"/>
-          </a:xfrm>
-          <a:prstGeom prst="rect">
-            <a:avLst/>
-          </a:prstGeom>
-          <a:noFill/>
-          <a:ln/>
-        </p:spPr>
-        <p:txBody>
-          <a:bodyPr wrap="square" rtlCol="0" anchor="ctr"/>
-          <a:lstStyle/>
-          <a:p>
-            <a:pPr indent="0" marL="0">
-              <a:buNone/>
-            </a:pPr>
-            <a:r>
-              <a:rPr lang="en-US" sz="1800" b="1" spc="100" kern="0" dirty="0">
-                <a:solidFill>
-                  <a:srgbClr val="0F6CBD"/>
-                </a:solidFill>
-                <a:latin typeface="Aptos" pitchFamily="34" charset="0"/>
-                <a:ea typeface="Aptos" pitchFamily="34" charset="-122"/>
-                <a:cs typeface="Aptos" pitchFamily="34" charset="-120"/>
-              </a:rPr>
-              <a:t>DOCUMENT THE OUTCOMES</a:t>
-            </a:r>
-            <a:endParaRPr lang="en-US" sz="1800" dirty="0"/>
-          </a:p>
-        </p:txBody>
-      </p:sp>
-      <p:sp>
-        <p:nvSpPr>
-          <p:cNvPr id="9" name="Text 7"/>
-          <p:cNvSpPr/>
-          <p:nvPr/>
-        </p:nvSpPr>
-        <p:spPr>
-          <a:xfrm>
-            <a:off x="731520" y="2103120"/>
-            <a:ext cx="4997196" cy="3749040"/>
+            <a:ext cx="11183112" cy="4572000"/>
           </a:xfrm>
           <a:prstGeom prst="rect">
             <a:avLst/>
@@ -3992,7 +4097,7 @@
                 <a:ea typeface="Aptos" pitchFamily="34" charset="-122"/>
                 <a:cs typeface="Aptos" pitchFamily="34" charset="-120"/>
               </a:rPr>
-              <a:t>Intended outcomes are clear, concise and well documented</a:t>
+              <a:t>It is the organisers' responsibility to ensure everyone is notified of the date, time and venue of the meeting, as well as the main issues to be discussed.</a:t>
             </a:r>
             <a:endParaRPr lang="en-US" sz="1800" dirty="0"/>
           </a:p>
@@ -4016,7 +4121,7 @@
                 <a:ea typeface="Aptos" pitchFamily="34" charset="-122"/>
                 <a:cs typeface="Aptos" pitchFamily="34" charset="-120"/>
               </a:rPr>
-              <a:t>The agenda is built around the outcomes</a:t>
+              <a:t>A consistent meeting day, time and location — e.g. the first Friday of the month in the same room — helps people make it a habit and cuts notification costs.</a:t>
             </a:r>
             <a:endParaRPr lang="en-US" sz="1800" dirty="0"/>
           </a:p>
@@ -4040,7 +4145,7 @@
                 <a:ea typeface="Aptos" pitchFamily="34" charset="-122"/>
                 <a:cs typeface="Aptos" pitchFamily="34" charset="-120"/>
               </a:rPr>
-              <a:t>Participants know what the meeting must achieve</a:t>
+              <a:t>Choose a space private enough for strong disagreements, where only the members of the group will be while you are using it.</a:t>
             </a:r>
             <a:endParaRPr lang="en-US" sz="1800" dirty="0"/>
           </a:p>
@@ -4064,105 +4169,10 @@
                 <a:ea typeface="Aptos" pitchFamily="34" charset="-122"/>
                 <a:cs typeface="Aptos" pitchFamily="34" charset="-120"/>
               </a:rPr>
-              <a:t>Afterwards, success is measured against the outcomes</a:t>
+              <a:t>Make sure the room is open and set up properly: enough chairs, seating in a circle, and the chairperson seated where everyone is visible.</a:t>
             </a:r>
             <a:endParaRPr lang="en-US" sz="1800" dirty="0"/>
           </a:p>
-        </p:txBody>
-      </p:sp>
-      <p:sp>
-        <p:nvSpPr>
-          <p:cNvPr id="10" name="Shape 8"/>
-          <p:cNvSpPr/>
-          <p:nvPr/>
-        </p:nvSpPr>
-        <p:spPr>
-          <a:xfrm>
-            <a:off x="6231636" y="1554480"/>
-            <a:ext cx="5454396" cy="4480560"/>
-          </a:xfrm>
-          <a:prstGeom prst="roundRect">
-            <a:avLst>
-              <a:gd name="adj" fmla="val 1837"/>
-            </a:avLst>
-          </a:prstGeom>
-          <a:solidFill>
-            <a:srgbClr val="FFFFFF"/>
-          </a:solidFill>
-          <a:ln w="12700">
-            <a:solidFill>
-              <a:srgbClr val="D5E3F2"/>
-            </a:solidFill>
-            <a:prstDash val="solid"/>
-          </a:ln>
-          <a:effectLst>
-            <a:outerShdw sx="100000" sy="100000" kx="0" ky="0" algn="bl" rotWithShape="0" blurRad="88900" dist="25400" dir="5400000">
-              <a:srgbClr val="9AB4CC">
-                <a:alpha val="30000"/>
-              </a:srgbClr>
-            </a:outerShdw>
-          </a:effectLst>
-        </p:spPr>
-      </p:sp>
-      <p:sp>
-        <p:nvSpPr>
-          <p:cNvPr id="11" name="Text 9"/>
-          <p:cNvSpPr/>
-          <p:nvPr/>
-        </p:nvSpPr>
-        <p:spPr>
-          <a:xfrm>
-            <a:off x="6460236" y="1737360"/>
-            <a:ext cx="4997196" cy="329184"/>
-          </a:xfrm>
-          <a:prstGeom prst="rect">
-            <a:avLst/>
-          </a:prstGeom>
-          <a:noFill/>
-          <a:ln/>
-        </p:spPr>
-        <p:txBody>
-          <a:bodyPr wrap="square" rtlCol="0" anchor="ctr"/>
-          <a:lstStyle/>
-          <a:p>
-            <a:pPr indent="0" marL="0">
-              <a:buNone/>
-            </a:pPr>
-            <a:r>
-              <a:rPr lang="en-US" sz="1800" b="1" spc="100" kern="0" dirty="0">
-                <a:solidFill>
-                  <a:srgbClr val="0F6CBD"/>
-                </a:solidFill>
-                <a:latin typeface="Aptos" pitchFamily="34" charset="0"/>
-                <a:ea typeface="Aptos" pitchFamily="34" charset="-122"/>
-                <a:cs typeface="Aptos" pitchFamily="34" charset="-120"/>
-              </a:rPr>
-              <a:t>INVITE TIMEOUSLY</a:t>
-            </a:r>
-            <a:endParaRPr lang="en-US" sz="1800" dirty="0"/>
-          </a:p>
-        </p:txBody>
-      </p:sp>
-      <p:sp>
-        <p:nvSpPr>
-          <p:cNvPr id="12" name="Text 10"/>
-          <p:cNvSpPr/>
-          <p:nvPr/>
-        </p:nvSpPr>
-        <p:spPr>
-          <a:xfrm>
-            <a:off x="6460236" y="2103120"/>
-            <a:ext cx="4997196" cy="3749040"/>
-          </a:xfrm>
-          <a:prstGeom prst="rect">
-            <a:avLst/>
-          </a:prstGeom>
-          <a:noFill/>
-          <a:ln/>
-        </p:spPr>
-        <p:txBody>
-          <a:bodyPr wrap="square" rtlCol="0" anchor="t"/>
-          <a:lstStyle/>
           <a:p>
             <a:pPr marL="203200" indent="-203200">
               <a:lnSpc>
@@ -4183,79 +4193,7 @@
                 <a:ea typeface="Aptos" pitchFamily="34" charset="-122"/>
                 <a:cs typeface="Aptos" pitchFamily="34" charset="-120"/>
               </a:rPr>
-              <a:t>Participants get time to prepare and study the documentation</a:t>
-            </a:r>
-            <a:endParaRPr lang="en-US" sz="1800" dirty="0"/>
-          </a:p>
-          <a:p>
-            <a:pPr marL="203200" indent="-203200">
-              <a:lnSpc>
-                <a:spcPct val="120000"/>
-              </a:lnSpc>
-              <a:spcAft>
-                <a:spcPts val="1000"/>
-              </a:spcAft>
-              <a:buSzPct val="100000"/>
-              <a:buChar char="•"/>
-            </a:pPr>
-            <a:r>
-              <a:rPr lang="en-US" sz="1800" dirty="0">
-                <a:solidFill>
-                  <a:srgbClr val="002050"/>
-                </a:solidFill>
-                <a:latin typeface="Aptos" pitchFamily="34" charset="0"/>
-                <a:ea typeface="Aptos" pitchFamily="34" charset="-122"/>
-                <a:cs typeface="Aptos" pitchFamily="34" charset="-120"/>
-              </a:rPr>
-              <a:t>Schedules can be arranged so the right people attend</a:t>
-            </a:r>
-            <a:endParaRPr lang="en-US" sz="1800" dirty="0"/>
-          </a:p>
-          <a:p>
-            <a:pPr marL="203200" indent="-203200">
-              <a:lnSpc>
-                <a:spcPct val="120000"/>
-              </a:lnSpc>
-              <a:spcAft>
-                <a:spcPts val="1000"/>
-              </a:spcAft>
-              <a:buSzPct val="100000"/>
-              <a:buChar char="•"/>
-            </a:pPr>
-            <a:r>
-              <a:rPr lang="en-US" sz="1800" dirty="0">
-                <a:solidFill>
-                  <a:srgbClr val="002050"/>
-                </a:solidFill>
-                <a:latin typeface="Aptos" pitchFamily="34" charset="0"/>
-                <a:ea typeface="Aptos" pitchFamily="34" charset="-122"/>
-                <a:cs typeface="Aptos" pitchFamily="34" charset="-120"/>
-              </a:rPr>
-              <a:t>Include date, time, venue and the meeting's purpose</a:t>
-            </a:r>
-            <a:endParaRPr lang="en-US" sz="1800" dirty="0"/>
-          </a:p>
-          <a:p>
-            <a:pPr marL="203200" indent="-203200">
-              <a:lnSpc>
-                <a:spcPct val="120000"/>
-              </a:lnSpc>
-              <a:spcAft>
-                <a:spcPts val="1000"/>
-              </a:spcAft>
-              <a:buSzPct val="100000"/>
-              <a:buChar char="•"/>
-            </a:pPr>
-            <a:r>
-              <a:rPr lang="en-US" sz="1800" dirty="0">
-                <a:solidFill>
-                  <a:srgbClr val="002050"/>
-                </a:solidFill>
-                <a:latin typeface="Aptos" pitchFamily="34" charset="0"/>
-                <a:ea typeface="Aptos" pitchFamily="34" charset="-122"/>
-                <a:cs typeface="Aptos" pitchFamily="34" charset="-120"/>
-              </a:rPr>
-              <a:t>Confirm attendance and arrange stand-ins where needed</a:t>
+              <a:t>The outcomes of the meeting must be outlined in the invitation, with the requirements of the meeting — sent out timeously so participants can prepare themselves accordingly.</a:t>
             </a:r>
             <a:endParaRPr lang="en-US" sz="1800" dirty="0"/>
           </a:p>
@@ -4463,7 +4401,971 @@
                 <a:ea typeface="Aptos Display" pitchFamily="34" charset="-122"/>
                 <a:cs typeface="Aptos Display" pitchFamily="34" charset="-120"/>
               </a:rPr>
-              <a:t>The agenda — the meeting's roadmap</a:t>
+              <a:t>Outcomes and invitations</a:t>
+            </a:r>
+            <a:endParaRPr lang="en-US" sz="3000" dirty="0"/>
+          </a:p>
+        </p:txBody>
+      </p:sp>
+      <p:sp>
+        <p:nvSpPr>
+          <p:cNvPr id="7" name="Shape 5"/>
+          <p:cNvSpPr/>
+          <p:nvPr/>
+        </p:nvSpPr>
+        <p:spPr>
+          <a:xfrm>
+            <a:off x="502920" y="1554480"/>
+            <a:ext cx="5454396" cy="4480560"/>
+          </a:xfrm>
+          <a:prstGeom prst="roundRect">
+            <a:avLst>
+              <a:gd name="adj" fmla="val 1837"/>
+            </a:avLst>
+          </a:prstGeom>
+          <a:solidFill>
+            <a:srgbClr val="FFFFFF"/>
+          </a:solidFill>
+          <a:ln w="12700">
+            <a:solidFill>
+              <a:srgbClr val="D5E3F2"/>
+            </a:solidFill>
+            <a:prstDash val="solid"/>
+          </a:ln>
+          <a:effectLst>
+            <a:outerShdw sx="100000" sy="100000" kx="0" ky="0" algn="bl" rotWithShape="0" blurRad="88900" dist="25400" dir="5400000">
+              <a:srgbClr val="9AB4CC">
+                <a:alpha val="30000"/>
+              </a:srgbClr>
+            </a:outerShdw>
+          </a:effectLst>
+        </p:spPr>
+      </p:sp>
+      <p:sp>
+        <p:nvSpPr>
+          <p:cNvPr id="8" name="Text 6"/>
+          <p:cNvSpPr/>
+          <p:nvPr/>
+        </p:nvSpPr>
+        <p:spPr>
+          <a:xfrm>
+            <a:off x="731520" y="1737360"/>
+            <a:ext cx="4997196" cy="329184"/>
+          </a:xfrm>
+          <a:prstGeom prst="rect">
+            <a:avLst/>
+          </a:prstGeom>
+          <a:noFill/>
+          <a:ln/>
+        </p:spPr>
+        <p:txBody>
+          <a:bodyPr wrap="square" rtlCol="0" anchor="ctr"/>
+          <a:lstStyle/>
+          <a:p>
+            <a:pPr indent="0" marL="0">
+              <a:buNone/>
+            </a:pPr>
+            <a:r>
+              <a:rPr lang="en-US" sz="1800" b="1" spc="100" kern="0" dirty="0">
+                <a:solidFill>
+                  <a:srgbClr val="0F6CBD"/>
+                </a:solidFill>
+                <a:latin typeface="Aptos" pitchFamily="34" charset="0"/>
+                <a:ea typeface="Aptos" pitchFamily="34" charset="-122"/>
+                <a:cs typeface="Aptos" pitchFamily="34" charset="-120"/>
+              </a:rPr>
+              <a:t>DOCUMENT THE OUTCOMES</a:t>
+            </a:r>
+            <a:endParaRPr lang="en-US" sz="1800" dirty="0"/>
+          </a:p>
+        </p:txBody>
+      </p:sp>
+      <p:sp>
+        <p:nvSpPr>
+          <p:cNvPr id="9" name="Text 7"/>
+          <p:cNvSpPr/>
+          <p:nvPr/>
+        </p:nvSpPr>
+        <p:spPr>
+          <a:xfrm>
+            <a:off x="731520" y="2103120"/>
+            <a:ext cx="4997196" cy="3749040"/>
+          </a:xfrm>
+          <a:prstGeom prst="rect">
+            <a:avLst/>
+          </a:prstGeom>
+          <a:noFill/>
+          <a:ln/>
+        </p:spPr>
+        <p:txBody>
+          <a:bodyPr wrap="square" rtlCol="0" anchor="t"/>
+          <a:lstStyle/>
+          <a:p>
+            <a:pPr marL="203200" indent="-203200">
+              <a:lnSpc>
+                <a:spcPct val="120000"/>
+              </a:lnSpc>
+              <a:spcAft>
+                <a:spcPts val="1000"/>
+              </a:spcAft>
+              <a:buSzPct val="100000"/>
+              <a:buChar char="•"/>
+            </a:pPr>
+            <a:r>
+              <a:rPr lang="en-US" sz="1800" dirty="0">
+                <a:solidFill>
+                  <a:srgbClr val="002050"/>
+                </a:solidFill>
+                <a:latin typeface="Aptos" pitchFamily="34" charset="0"/>
+                <a:ea typeface="Aptos" pitchFamily="34" charset="-122"/>
+                <a:cs typeface="Aptos" pitchFamily="34" charset="-120"/>
+              </a:rPr>
+              <a:t>Intended outcomes are clear, concise and well documented</a:t>
+            </a:r>
+            <a:endParaRPr lang="en-US" sz="1800" dirty="0"/>
+          </a:p>
+          <a:p>
+            <a:pPr marL="203200" indent="-203200">
+              <a:lnSpc>
+                <a:spcPct val="120000"/>
+              </a:lnSpc>
+              <a:spcAft>
+                <a:spcPts val="1000"/>
+              </a:spcAft>
+              <a:buSzPct val="100000"/>
+              <a:buChar char="•"/>
+            </a:pPr>
+            <a:r>
+              <a:rPr lang="en-US" sz="1800" dirty="0">
+                <a:solidFill>
+                  <a:srgbClr val="002050"/>
+                </a:solidFill>
+                <a:latin typeface="Aptos" pitchFamily="34" charset="0"/>
+                <a:ea typeface="Aptos" pitchFamily="34" charset="-122"/>
+                <a:cs typeface="Aptos" pitchFamily="34" charset="-120"/>
+              </a:rPr>
+              <a:t>Participants understand what is expected of them — and in which format it must be returned</a:t>
+            </a:r>
+            <a:endParaRPr lang="en-US" sz="1800" dirty="0"/>
+          </a:p>
+          <a:p>
+            <a:pPr marL="203200" indent="-203200">
+              <a:lnSpc>
+                <a:spcPct val="120000"/>
+              </a:lnSpc>
+              <a:spcAft>
+                <a:spcPts val="1000"/>
+              </a:spcAft>
+              <a:buSzPct val="100000"/>
+              <a:buChar char="•"/>
+            </a:pPr>
+            <a:r>
+              <a:rPr lang="en-US" sz="1800" dirty="0">
+                <a:solidFill>
+                  <a:srgbClr val="002050"/>
+                </a:solidFill>
+                <a:latin typeface="Aptos" pitchFamily="34" charset="0"/>
+                <a:ea typeface="Aptos" pitchFamily="34" charset="-122"/>
+                <a:cs typeface="Aptos" pitchFamily="34" charset="-120"/>
+              </a:rPr>
+              <a:t>The agenda is built around the outcomes</a:t>
+            </a:r>
+            <a:endParaRPr lang="en-US" sz="1800" dirty="0"/>
+          </a:p>
+          <a:p>
+            <a:pPr marL="203200" indent="-203200">
+              <a:lnSpc>
+                <a:spcPct val="120000"/>
+              </a:lnSpc>
+              <a:spcAft>
+                <a:spcPts val="1000"/>
+              </a:spcAft>
+              <a:buSzPct val="100000"/>
+              <a:buChar char="•"/>
+            </a:pPr>
+            <a:r>
+              <a:rPr lang="en-US" sz="1800" dirty="0">
+                <a:solidFill>
+                  <a:srgbClr val="002050"/>
+                </a:solidFill>
+                <a:latin typeface="Aptos" pitchFamily="34" charset="0"/>
+                <a:ea typeface="Aptos" pitchFamily="34" charset="-122"/>
+                <a:cs typeface="Aptos" pitchFamily="34" charset="-120"/>
+              </a:rPr>
+              <a:t>Afterwards, success is measured against the outcomes</a:t>
+            </a:r>
+            <a:endParaRPr lang="en-US" sz="1800" dirty="0"/>
+          </a:p>
+        </p:txBody>
+      </p:sp>
+      <p:sp>
+        <p:nvSpPr>
+          <p:cNvPr id="10" name="Shape 8"/>
+          <p:cNvSpPr/>
+          <p:nvPr/>
+        </p:nvSpPr>
+        <p:spPr>
+          <a:xfrm>
+            <a:off x="6231636" y="1554480"/>
+            <a:ext cx="5454396" cy="4480560"/>
+          </a:xfrm>
+          <a:prstGeom prst="roundRect">
+            <a:avLst>
+              <a:gd name="adj" fmla="val 1837"/>
+            </a:avLst>
+          </a:prstGeom>
+          <a:solidFill>
+            <a:srgbClr val="FFFFFF"/>
+          </a:solidFill>
+          <a:ln w="12700">
+            <a:solidFill>
+              <a:srgbClr val="D5E3F2"/>
+            </a:solidFill>
+            <a:prstDash val="solid"/>
+          </a:ln>
+          <a:effectLst>
+            <a:outerShdw sx="100000" sy="100000" kx="0" ky="0" algn="bl" rotWithShape="0" blurRad="88900" dist="25400" dir="5400000">
+              <a:srgbClr val="9AB4CC">
+                <a:alpha val="30000"/>
+              </a:srgbClr>
+            </a:outerShdw>
+          </a:effectLst>
+        </p:spPr>
+      </p:sp>
+      <p:sp>
+        <p:nvSpPr>
+          <p:cNvPr id="11" name="Text 9"/>
+          <p:cNvSpPr/>
+          <p:nvPr/>
+        </p:nvSpPr>
+        <p:spPr>
+          <a:xfrm>
+            <a:off x="6460236" y="1737360"/>
+            <a:ext cx="4997196" cy="329184"/>
+          </a:xfrm>
+          <a:prstGeom prst="rect">
+            <a:avLst/>
+          </a:prstGeom>
+          <a:noFill/>
+          <a:ln/>
+        </p:spPr>
+        <p:txBody>
+          <a:bodyPr wrap="square" rtlCol="0" anchor="ctr"/>
+          <a:lstStyle/>
+          <a:p>
+            <a:pPr indent="0" marL="0">
+              <a:buNone/>
+            </a:pPr>
+            <a:r>
+              <a:rPr lang="en-US" sz="1800" b="1" spc="100" kern="0" dirty="0">
+                <a:solidFill>
+                  <a:srgbClr val="0F6CBD"/>
+                </a:solidFill>
+                <a:latin typeface="Aptos" pitchFamily="34" charset="0"/>
+                <a:ea typeface="Aptos" pitchFamily="34" charset="-122"/>
+                <a:cs typeface="Aptos" pitchFamily="34" charset="-120"/>
+              </a:rPr>
+              <a:t>INVITE TIMEOUSLY</a:t>
+            </a:r>
+            <a:endParaRPr lang="en-US" sz="1800" dirty="0"/>
+          </a:p>
+        </p:txBody>
+      </p:sp>
+      <p:sp>
+        <p:nvSpPr>
+          <p:cNvPr id="12" name="Text 10"/>
+          <p:cNvSpPr/>
+          <p:nvPr/>
+        </p:nvSpPr>
+        <p:spPr>
+          <a:xfrm>
+            <a:off x="6460236" y="2103120"/>
+            <a:ext cx="4997196" cy="3749040"/>
+          </a:xfrm>
+          <a:prstGeom prst="rect">
+            <a:avLst/>
+          </a:prstGeom>
+          <a:noFill/>
+          <a:ln/>
+        </p:spPr>
+        <p:txBody>
+          <a:bodyPr wrap="square" rtlCol="0" anchor="t"/>
+          <a:lstStyle/>
+          <a:p>
+            <a:pPr marL="203200" indent="-203200">
+              <a:lnSpc>
+                <a:spcPct val="120000"/>
+              </a:lnSpc>
+              <a:spcAft>
+                <a:spcPts val="1000"/>
+              </a:spcAft>
+              <a:buSzPct val="100000"/>
+              <a:buChar char="•"/>
+            </a:pPr>
+            <a:r>
+              <a:rPr lang="en-US" sz="1800" dirty="0">
+                <a:solidFill>
+                  <a:srgbClr val="002050"/>
+                </a:solidFill>
+                <a:latin typeface="Aptos" pitchFamily="34" charset="0"/>
+                <a:ea typeface="Aptos" pitchFamily="34" charset="-122"/>
+                <a:cs typeface="Aptos" pitchFamily="34" charset="-120"/>
+              </a:rPr>
+              <a:t>Include date, time, venue, purpose and the meeting's outcomes</a:t>
+            </a:r>
+            <a:endParaRPr lang="en-US" sz="1800" dirty="0"/>
+          </a:p>
+          <a:p>
+            <a:pPr marL="203200" indent="-203200">
+              <a:lnSpc>
+                <a:spcPct val="120000"/>
+              </a:lnSpc>
+              <a:spcAft>
+                <a:spcPts val="1000"/>
+              </a:spcAft>
+              <a:buSzPct val="100000"/>
+              <a:buChar char="•"/>
+            </a:pPr>
+            <a:r>
+              <a:rPr lang="en-US" sz="1800" dirty="0">
+                <a:solidFill>
+                  <a:srgbClr val="002050"/>
+                </a:solidFill>
+                <a:latin typeface="Aptos" pitchFamily="34" charset="0"/>
+                <a:ea typeface="Aptos" pitchFamily="34" charset="-122"/>
+                <a:cs typeface="Aptos" pitchFamily="34" charset="-120"/>
+              </a:rPr>
+              <a:t>Send early enough for participants to prepare and study the documentation</a:t>
+            </a:r>
+            <a:endParaRPr lang="en-US" sz="1800" dirty="0"/>
+          </a:p>
+          <a:p>
+            <a:pPr marL="203200" indent="-203200">
+              <a:lnSpc>
+                <a:spcPct val="120000"/>
+              </a:lnSpc>
+              <a:spcAft>
+                <a:spcPts val="1000"/>
+              </a:spcAft>
+              <a:buSzPct val="100000"/>
+              <a:buChar char="•"/>
+            </a:pPr>
+            <a:r>
+              <a:rPr lang="en-US" sz="1800" dirty="0">
+                <a:solidFill>
+                  <a:srgbClr val="002050"/>
+                </a:solidFill>
+                <a:latin typeface="Aptos" pitchFamily="34" charset="0"/>
+                <a:ea typeface="Aptos" pitchFamily="34" charset="-122"/>
+                <a:cs typeface="Aptos" pitchFamily="34" charset="-120"/>
+              </a:rPr>
+              <a:t>Schedules can be arranged so the right people attend</a:t>
+            </a:r>
+            <a:endParaRPr lang="en-US" sz="1800" dirty="0"/>
+          </a:p>
+          <a:p>
+            <a:pPr marL="203200" indent="-203200">
+              <a:lnSpc>
+                <a:spcPct val="120000"/>
+              </a:lnSpc>
+              <a:spcAft>
+                <a:spcPts val="1000"/>
+              </a:spcAft>
+              <a:buSzPct val="100000"/>
+              <a:buChar char="•"/>
+            </a:pPr>
+            <a:r>
+              <a:rPr lang="en-US" sz="1800" dirty="0">
+                <a:solidFill>
+                  <a:srgbClr val="002050"/>
+                </a:solidFill>
+                <a:latin typeface="Aptos" pitchFamily="34" charset="0"/>
+                <a:ea typeface="Aptos" pitchFamily="34" charset="-122"/>
+                <a:cs typeface="Aptos" pitchFamily="34" charset="-120"/>
+              </a:rPr>
+              <a:t>Confirm attendance and arrange stand-ins where needed</a:t>
+            </a:r>
+            <a:endParaRPr lang="en-US" sz="1800" dirty="0"/>
+          </a:p>
+        </p:txBody>
+      </p:sp>
+    </p:spTree>
+  </p:cSld>
+  <p:clrMapOvr>
+    <a:masterClrMapping/>
+  </p:clrMapOvr>
+</p:sld>
+</file>
+
+<file path=ppt/slides/slide6.xml><?xml version="1.0" encoding="utf-8"?>
+<p:sld xmlns:a="http://schemas.openxmlformats.org/drawingml/2006/main" xmlns:r="http://schemas.openxmlformats.org/officeDocument/2006/relationships" xmlns:p="http://schemas.openxmlformats.org/presentationml/2006/main">
+  <p:cSld name="Slide 6">
+    <p:bg>
+      <p:bgPr>
+        <a:solidFill>
+          <a:srgbClr val="FFFFFF"/>
+        </a:solidFill>
+      </p:bgPr>
+    </p:bg>
+    <p:spTree>
+      <p:nvGrpSpPr>
+        <p:cNvPr id="1" name=""/>
+        <p:cNvGrpSpPr/>
+        <p:nvPr/>
+      </p:nvGrpSpPr>
+      <p:grpSpPr>
+        <a:xfrm>
+          <a:off x="0" y="0"/>
+          <a:ext cx="0" cy="0"/>
+          <a:chOff x="0" y="0"/>
+          <a:chExt cx="0" cy="0"/>
+        </a:xfrm>
+      </p:grpSpPr>
+      <p:sp>
+        <p:nvSpPr>
+          <p:cNvPr id="2" name="Text 0"/>
+          <p:cNvSpPr/>
+          <p:nvPr/>
+        </p:nvSpPr>
+        <p:spPr>
+          <a:xfrm>
+            <a:off x="502920" y="6400800"/>
+            <a:ext cx="10268712" cy="347472"/>
+          </a:xfrm>
+          <a:prstGeom prst="rect">
+            <a:avLst/>
+          </a:prstGeom>
+          <a:noFill/>
+          <a:ln/>
+        </p:spPr>
+        <p:txBody>
+          <a:bodyPr wrap="square" rtlCol="0" anchor="ctr"/>
+          <a:lstStyle/>
+          <a:p>
+            <a:pPr indent="0" marL="0">
+              <a:buNone/>
+            </a:pPr>
+            <a:r>
+              <a:rPr lang="en-US" sz="1800" dirty="0">
+                <a:solidFill>
+                  <a:srgbClr val="6B7280"/>
+                </a:solidFill>
+                <a:latin typeface="Aptos" pitchFamily="34" charset="0"/>
+                <a:ea typeface="Aptos" pitchFamily="34" charset="-122"/>
+                <a:cs typeface="Aptos" pitchFamily="34" charset="-120"/>
+              </a:rPr>
+              <a:t>US 114051 · Conduct a technical practitioners meeting · NQF 5 · 4 credits</a:t>
+            </a:r>
+            <a:endParaRPr lang="en-US" sz="1800" dirty="0"/>
+          </a:p>
+        </p:txBody>
+      </p:sp>
+      <p:sp>
+        <p:nvSpPr>
+          <p:cNvPr id="3" name="Text 1"/>
+          <p:cNvSpPr/>
+          <p:nvPr/>
+        </p:nvSpPr>
+        <p:spPr>
+          <a:xfrm>
+            <a:off x="11045952" y="6400800"/>
+            <a:ext cx="640080" cy="347472"/>
+          </a:xfrm>
+          <a:prstGeom prst="rect">
+            <a:avLst/>
+          </a:prstGeom>
+          <a:noFill/>
+          <a:ln/>
+        </p:spPr>
+        <p:txBody>
+          <a:bodyPr wrap="square" rtlCol="0" anchor="ctr"/>
+          <a:lstStyle/>
+          <a:p>
+            <a:pPr algn="r" indent="0" marL="0">
+              <a:buNone/>
+            </a:pPr>
+            <a:r>
+              <a:rPr lang="en-US" sz="1800" dirty="0">
+                <a:solidFill>
+                  <a:srgbClr val="6B7280"/>
+                </a:solidFill>
+                <a:latin typeface="Aptos" pitchFamily="34" charset="0"/>
+                <a:ea typeface="Aptos" pitchFamily="34" charset="-122"/>
+                <a:cs typeface="Aptos" pitchFamily="34" charset="-120"/>
+              </a:rPr>
+              <a:t>6</a:t>
+            </a:r>
+            <a:endParaRPr lang="en-US" sz="1800" dirty="0"/>
+          </a:p>
+        </p:txBody>
+      </p:sp>
+      <p:sp>
+        <p:nvSpPr>
+          <p:cNvPr id="4" name="Shape 2"/>
+          <p:cNvSpPr/>
+          <p:nvPr/>
+        </p:nvSpPr>
+        <p:spPr>
+          <a:xfrm>
+            <a:off x="0" y="0"/>
+            <a:ext cx="12188952" cy="82296"/>
+          </a:xfrm>
+          <a:prstGeom prst="rect">
+            <a:avLst/>
+          </a:prstGeom>
+          <a:solidFill>
+            <a:srgbClr val="0F6CBD"/>
+          </a:solidFill>
+          <a:ln/>
+        </p:spPr>
+      </p:sp>
+      <p:sp>
+        <p:nvSpPr>
+          <p:cNvPr id="5" name="Text 3"/>
+          <p:cNvSpPr/>
+          <p:nvPr/>
+        </p:nvSpPr>
+        <p:spPr>
+          <a:xfrm>
+            <a:off x="502920" y="237744"/>
+            <a:ext cx="11183112" cy="347472"/>
+          </a:xfrm>
+          <a:prstGeom prst="rect">
+            <a:avLst/>
+          </a:prstGeom>
+          <a:noFill/>
+          <a:ln/>
+        </p:spPr>
+        <p:txBody>
+          <a:bodyPr wrap="square" rtlCol="0" anchor="ctr"/>
+          <a:lstStyle/>
+          <a:p>
+            <a:pPr indent="0" marL="0">
+              <a:buNone/>
+            </a:pPr>
+            <a:r>
+              <a:rPr lang="en-US" sz="1800" b="1" spc="200" kern="0" dirty="0">
+                <a:solidFill>
+                  <a:srgbClr val="0F6CBD"/>
+                </a:solidFill>
+                <a:latin typeface="Aptos" pitchFamily="34" charset="0"/>
+                <a:ea typeface="Aptos" pitchFamily="34" charset="-122"/>
+                <a:cs typeface="Aptos" pitchFamily="34" charset="-120"/>
+              </a:rPr>
+              <a:t>PREPARE THE MEETING</a:t>
+            </a:r>
+            <a:endParaRPr lang="en-US" sz="1800" dirty="0"/>
+          </a:p>
+        </p:txBody>
+      </p:sp>
+      <p:sp>
+        <p:nvSpPr>
+          <p:cNvPr id="6" name="Text 4"/>
+          <p:cNvSpPr/>
+          <p:nvPr/>
+        </p:nvSpPr>
+        <p:spPr>
+          <a:xfrm>
+            <a:off x="502920" y="585216"/>
+            <a:ext cx="11183112" cy="603504"/>
+          </a:xfrm>
+          <a:prstGeom prst="rect">
+            <a:avLst/>
+          </a:prstGeom>
+          <a:noFill/>
+          <a:ln/>
+        </p:spPr>
+        <p:txBody>
+          <a:bodyPr wrap="square" rtlCol="0" anchor="ctr"/>
+          <a:lstStyle/>
+          <a:p>
+            <a:pPr indent="0" marL="0">
+              <a:buNone/>
+            </a:pPr>
+            <a:r>
+              <a:rPr lang="en-US" sz="3000" b="1" dirty="0">
+                <a:solidFill>
+                  <a:srgbClr val="002050"/>
+                </a:solidFill>
+                <a:latin typeface="Aptos Display" pitchFamily="34" charset="0"/>
+                <a:ea typeface="Aptos Display" pitchFamily="34" charset="-122"/>
+                <a:cs typeface="Aptos Display" pitchFamily="34" charset="-120"/>
+              </a:rPr>
+              <a:t>Preparing the agenda</a:t>
+            </a:r>
+            <a:endParaRPr lang="en-US" sz="3000" dirty="0"/>
+          </a:p>
+        </p:txBody>
+      </p:sp>
+      <p:sp>
+        <p:nvSpPr>
+          <p:cNvPr id="7" name="Text 5"/>
+          <p:cNvSpPr/>
+          <p:nvPr/>
+        </p:nvSpPr>
+        <p:spPr>
+          <a:xfrm>
+            <a:off x="502920" y="1517904"/>
+            <a:ext cx="11183112" cy="4572000"/>
+          </a:xfrm>
+          <a:prstGeom prst="rect">
+            <a:avLst/>
+          </a:prstGeom>
+          <a:noFill/>
+          <a:ln/>
+        </p:spPr>
+        <p:txBody>
+          <a:bodyPr wrap="square" rtlCol="0" anchor="t"/>
+          <a:lstStyle/>
+          <a:p>
+            <a:pPr marL="203200" indent="-203200">
+              <a:lnSpc>
+                <a:spcPct val="120000"/>
+              </a:lnSpc>
+              <a:spcAft>
+                <a:spcPts val="1000"/>
+              </a:spcAft>
+              <a:buSzPct val="100000"/>
+              <a:buChar char="•"/>
+            </a:pPr>
+            <a:r>
+              <a:rPr lang="en-US" sz="1800" dirty="0">
+                <a:solidFill>
+                  <a:srgbClr val="002050"/>
+                </a:solidFill>
+                <a:latin typeface="Aptos" pitchFamily="34" charset="0"/>
+                <a:ea typeface="Aptos" pitchFamily="34" charset="-122"/>
+                <a:cs typeface="Aptos" pitchFamily="34" charset="-120"/>
+              </a:rPr>
+              <a:t>The agenda is a list of the most important issues for the members to discuss — the responsibility of the chairperson and the secretary.</a:t>
+            </a:r>
+            <a:endParaRPr lang="en-US" sz="1800" dirty="0"/>
+          </a:p>
+          <a:p>
+            <a:pPr marL="203200" indent="-203200">
+              <a:lnSpc>
+                <a:spcPct val="120000"/>
+              </a:lnSpc>
+              <a:spcAft>
+                <a:spcPts val="1000"/>
+              </a:spcAft>
+              <a:buSzPct val="100000"/>
+              <a:buChar char="•"/>
+            </a:pPr>
+            <a:r>
+              <a:rPr lang="en-US" sz="1800" dirty="0">
+                <a:solidFill>
+                  <a:srgbClr val="002050"/>
+                </a:solidFill>
+                <a:latin typeface="Aptos" pitchFamily="34" charset="0"/>
+                <a:ea typeface="Aptos" pitchFamily="34" charset="-122"/>
+                <a:cs typeface="Aptos" pitchFamily="34" charset="-120"/>
+              </a:rPr>
+              <a:t>It is drawn from the Matters Arising of the previous meeting: tasks needing a report-back, matters that needed further information, and matters deferred to this meeting. The chairperson reads the previous minutes to prepare.</a:t>
+            </a:r>
+            <a:endParaRPr lang="en-US" sz="1800" dirty="0"/>
+          </a:p>
+          <a:p>
+            <a:pPr marL="203200" indent="-203200">
+              <a:lnSpc>
+                <a:spcPct val="120000"/>
+              </a:lnSpc>
+              <a:spcAft>
+                <a:spcPts val="1000"/>
+              </a:spcAft>
+              <a:buSzPct val="100000"/>
+              <a:buChar char="•"/>
+            </a:pPr>
+            <a:r>
+              <a:rPr lang="en-US" sz="1800" dirty="0">
+                <a:solidFill>
+                  <a:srgbClr val="002050"/>
+                </a:solidFill>
+                <a:latin typeface="Aptos" pitchFamily="34" charset="0"/>
+                <a:ea typeface="Aptos" pitchFamily="34" charset="-122"/>
+                <a:cs typeface="Aptos" pitchFamily="34" charset="-120"/>
+              </a:rPr>
+              <a:t>Arrange items in order of priority and allocate time for each discussion; familiarise yourself with each area of discussion.</a:t>
+            </a:r>
+            <a:endParaRPr lang="en-US" sz="1800" dirty="0"/>
+          </a:p>
+          <a:p>
+            <a:pPr marL="203200" indent="-203200">
+              <a:lnSpc>
+                <a:spcPct val="120000"/>
+              </a:lnSpc>
+              <a:spcAft>
+                <a:spcPts val="1000"/>
+              </a:spcAft>
+              <a:buSzPct val="100000"/>
+              <a:buChar char="•"/>
+            </a:pPr>
+            <a:r>
+              <a:rPr lang="en-US" sz="1800" dirty="0">
+                <a:solidFill>
+                  <a:srgbClr val="002050"/>
+                </a:solidFill>
+                <a:latin typeface="Aptos" pitchFamily="34" charset="0"/>
+                <a:ea typeface="Aptos" pitchFamily="34" charset="-122"/>
+                <a:cs typeface="Aptos" pitchFamily="34" charset="-120"/>
+              </a:rPr>
+              <a:t>An agenda gives people time to plan, do assignments and bring the necessary information — it can be printed and distributed in advance, or written up where everyone can see it.</a:t>
+            </a:r>
+            <a:endParaRPr lang="en-US" sz="1800" dirty="0"/>
+          </a:p>
+          <a:p>
+            <a:pPr marL="203200" indent="-203200">
+              <a:lnSpc>
+                <a:spcPct val="120000"/>
+              </a:lnSpc>
+              <a:spcAft>
+                <a:spcPts val="1000"/>
+              </a:spcAft>
+              <a:buSzPct val="100000"/>
+              <a:buChar char="•"/>
+            </a:pPr>
+            <a:r>
+              <a:rPr lang="en-US" sz="1800" dirty="0">
+                <a:solidFill>
+                  <a:srgbClr val="002050"/>
+                </a:solidFill>
+                <a:latin typeface="Aptos" pitchFamily="34" charset="0"/>
+                <a:ea typeface="Aptos" pitchFamily="34" charset="-122"/>
+                <a:cs typeface="Aptos" pitchFamily="34" charset="-120"/>
+              </a:rPr>
+              <a:t>It is not set in stone: additions can be discussed and approved at the start, and the chair may set a maximum time per topic if there is a lot to get through.</a:t>
+            </a:r>
+            <a:endParaRPr lang="en-US" sz="1800" dirty="0"/>
+          </a:p>
+          <a:p>
+            <a:pPr marL="203200" indent="-203200">
+              <a:lnSpc>
+                <a:spcPct val="120000"/>
+              </a:lnSpc>
+              <a:spcAft>
+                <a:spcPts val="1000"/>
+              </a:spcAft>
+              <a:buSzPct val="100000"/>
+              <a:buChar char="•"/>
+            </a:pPr>
+            <a:r>
+              <a:rPr lang="en-US" sz="1800" dirty="0">
+                <a:solidFill>
+                  <a:srgbClr val="002050"/>
+                </a:solidFill>
+                <a:latin typeface="Aptos" pitchFamily="34" charset="0"/>
+                <a:ea typeface="Aptos" pitchFamily="34" charset="-122"/>
+                <a:cs typeface="Aptos" pitchFamily="34" charset="-120"/>
+              </a:rPr>
+              <a:t>The last item is General / Any Other Business — for short items not included on the agenda.</a:t>
+            </a:r>
+            <a:endParaRPr lang="en-US" sz="1800" dirty="0"/>
+          </a:p>
+        </p:txBody>
+      </p:sp>
+    </p:spTree>
+  </p:cSld>
+  <p:clrMapOvr>
+    <a:masterClrMapping/>
+  </p:clrMapOvr>
+</p:sld>
+</file>
+
+<file path=ppt/slides/slide7.xml><?xml version="1.0" encoding="utf-8"?>
+<p:sld xmlns:a="http://schemas.openxmlformats.org/drawingml/2006/main" xmlns:r="http://schemas.openxmlformats.org/officeDocument/2006/relationships" xmlns:p="http://schemas.openxmlformats.org/presentationml/2006/main">
+  <p:cSld name="Slide 7">
+    <p:bg>
+      <p:bgPr>
+        <a:solidFill>
+          <a:srgbClr val="FFFFFF"/>
+        </a:solidFill>
+      </p:bgPr>
+    </p:bg>
+    <p:spTree>
+      <p:nvGrpSpPr>
+        <p:cNvPr id="1" name=""/>
+        <p:cNvGrpSpPr/>
+        <p:nvPr/>
+      </p:nvGrpSpPr>
+      <p:grpSpPr>
+        <a:xfrm>
+          <a:off x="0" y="0"/>
+          <a:ext cx="0" cy="0"/>
+          <a:chOff x="0" y="0"/>
+          <a:chExt cx="0" cy="0"/>
+        </a:xfrm>
+      </p:grpSpPr>
+      <p:sp>
+        <p:nvSpPr>
+          <p:cNvPr id="2" name="Text 0"/>
+          <p:cNvSpPr/>
+          <p:nvPr/>
+        </p:nvSpPr>
+        <p:spPr>
+          <a:xfrm>
+            <a:off x="502920" y="6400800"/>
+            <a:ext cx="10268712" cy="347472"/>
+          </a:xfrm>
+          <a:prstGeom prst="rect">
+            <a:avLst/>
+          </a:prstGeom>
+          <a:noFill/>
+          <a:ln/>
+        </p:spPr>
+        <p:txBody>
+          <a:bodyPr wrap="square" rtlCol="0" anchor="ctr"/>
+          <a:lstStyle/>
+          <a:p>
+            <a:pPr indent="0" marL="0">
+              <a:buNone/>
+            </a:pPr>
+            <a:r>
+              <a:rPr lang="en-US" sz="1800" dirty="0">
+                <a:solidFill>
+                  <a:srgbClr val="6B7280"/>
+                </a:solidFill>
+                <a:latin typeface="Aptos" pitchFamily="34" charset="0"/>
+                <a:ea typeface="Aptos" pitchFamily="34" charset="-122"/>
+                <a:cs typeface="Aptos" pitchFamily="34" charset="-120"/>
+              </a:rPr>
+              <a:t>US 114051 · Conduct a technical practitioners meeting · NQF 5 · 4 credits</a:t>
+            </a:r>
+            <a:endParaRPr lang="en-US" sz="1800" dirty="0"/>
+          </a:p>
+        </p:txBody>
+      </p:sp>
+      <p:sp>
+        <p:nvSpPr>
+          <p:cNvPr id="3" name="Text 1"/>
+          <p:cNvSpPr/>
+          <p:nvPr/>
+        </p:nvSpPr>
+        <p:spPr>
+          <a:xfrm>
+            <a:off x="11045952" y="6400800"/>
+            <a:ext cx="640080" cy="347472"/>
+          </a:xfrm>
+          <a:prstGeom prst="rect">
+            <a:avLst/>
+          </a:prstGeom>
+          <a:noFill/>
+          <a:ln/>
+        </p:spPr>
+        <p:txBody>
+          <a:bodyPr wrap="square" rtlCol="0" anchor="ctr"/>
+          <a:lstStyle/>
+          <a:p>
+            <a:pPr algn="r" indent="0" marL="0">
+              <a:buNone/>
+            </a:pPr>
+            <a:r>
+              <a:rPr lang="en-US" sz="1800" dirty="0">
+                <a:solidFill>
+                  <a:srgbClr val="6B7280"/>
+                </a:solidFill>
+                <a:latin typeface="Aptos" pitchFamily="34" charset="0"/>
+                <a:ea typeface="Aptos" pitchFamily="34" charset="-122"/>
+                <a:cs typeface="Aptos" pitchFamily="34" charset="-120"/>
+              </a:rPr>
+              <a:t>7</a:t>
+            </a:r>
+            <a:endParaRPr lang="en-US" sz="1800" dirty="0"/>
+          </a:p>
+        </p:txBody>
+      </p:sp>
+      <p:sp>
+        <p:nvSpPr>
+          <p:cNvPr id="4" name="Shape 2"/>
+          <p:cNvSpPr/>
+          <p:nvPr/>
+        </p:nvSpPr>
+        <p:spPr>
+          <a:xfrm>
+            <a:off x="0" y="0"/>
+            <a:ext cx="12188952" cy="82296"/>
+          </a:xfrm>
+          <a:prstGeom prst="rect">
+            <a:avLst/>
+          </a:prstGeom>
+          <a:solidFill>
+            <a:srgbClr val="0F6CBD"/>
+          </a:solidFill>
+          <a:ln/>
+        </p:spPr>
+      </p:sp>
+      <p:sp>
+        <p:nvSpPr>
+          <p:cNvPr id="5" name="Text 3"/>
+          <p:cNvSpPr/>
+          <p:nvPr/>
+        </p:nvSpPr>
+        <p:spPr>
+          <a:xfrm>
+            <a:off x="502920" y="237744"/>
+            <a:ext cx="11183112" cy="347472"/>
+          </a:xfrm>
+          <a:prstGeom prst="rect">
+            <a:avLst/>
+          </a:prstGeom>
+          <a:noFill/>
+          <a:ln/>
+        </p:spPr>
+        <p:txBody>
+          <a:bodyPr wrap="square" rtlCol="0" anchor="ctr"/>
+          <a:lstStyle/>
+          <a:p>
+            <a:pPr indent="0" marL="0">
+              <a:buNone/>
+            </a:pPr>
+            <a:r>
+              <a:rPr lang="en-US" sz="1800" b="1" spc="200" kern="0" dirty="0">
+                <a:solidFill>
+                  <a:srgbClr val="0F6CBD"/>
+                </a:solidFill>
+                <a:latin typeface="Aptos" pitchFamily="34" charset="0"/>
+                <a:ea typeface="Aptos" pitchFamily="34" charset="-122"/>
+                <a:cs typeface="Aptos" pitchFamily="34" charset="-120"/>
+              </a:rPr>
+              <a:t>PREPARE THE MEETING</a:t>
+            </a:r>
+            <a:endParaRPr lang="en-US" sz="1800" dirty="0"/>
+          </a:p>
+        </p:txBody>
+      </p:sp>
+      <p:sp>
+        <p:nvSpPr>
+          <p:cNvPr id="6" name="Text 4"/>
+          <p:cNvSpPr/>
+          <p:nvPr/>
+        </p:nvSpPr>
+        <p:spPr>
+          <a:xfrm>
+            <a:off x="502920" y="585216"/>
+            <a:ext cx="11183112" cy="603504"/>
+          </a:xfrm>
+          <a:prstGeom prst="rect">
+            <a:avLst/>
+          </a:prstGeom>
+          <a:noFill/>
+          <a:ln/>
+        </p:spPr>
+        <p:txBody>
+          <a:bodyPr wrap="square" rtlCol="0" anchor="ctr"/>
+          <a:lstStyle/>
+          <a:p>
+            <a:pPr indent="0" marL="0">
+              <a:buNone/>
+            </a:pPr>
+            <a:r>
+              <a:rPr lang="en-US" sz="3000" b="1" dirty="0">
+                <a:solidFill>
+                  <a:srgbClr val="002050"/>
+                </a:solidFill>
+                <a:latin typeface="Aptos Display" pitchFamily="34" charset="0"/>
+                <a:ea typeface="Aptos Display" pitchFamily="34" charset="-122"/>
+                <a:cs typeface="Aptos Display" pitchFamily="34" charset="-120"/>
+              </a:rPr>
+              <a:t>The standard agenda</a:t>
             </a:r>
             <a:endParaRPr lang="en-US" sz="3000" dirty="0"/>
           </a:p>
@@ -4505,7 +5407,7 @@
                 <a:ea typeface="Aptos" pitchFamily="34" charset="-122"/>
                 <a:cs typeface="Aptos" pitchFamily="34" charset="-120"/>
               </a:rPr>
-              <a:t>Complete the agenda and distribute it with the supporting documentation before the meeting.</a:t>
+              <a:t>An agenda should include all of the following items that apply to your group:</a:t>
             </a:r>
             <a:endParaRPr lang="en-US" sz="1800" dirty="0"/>
           </a:p>
@@ -4513,7 +5415,7 @@
       </p:sp>
       <p:graphicFrame>
         <p:nvGraphicFramePr>
-          <p:cNvPr id="6" name="Table 0"/>
+          <p:cNvPr id="8" name="Table 0"/>
           <p:cNvGraphicFramePr>
             <a:graphicFrameLocks noGrp="1"/>
           </p:cNvGraphicFramePr>
@@ -4526,7 +5428,7 @@
           </p:nvPr>
         </p:nvGraphicFramePr>
         <p:xfrm>
-          <a:off x="502920" y="1920240"/>
+          <a:off x="502920" y="1874520"/>
           <a:ext cx="11183112" cy="914400"/>
         </p:xfrm>
         <a:graphic>
@@ -4534,10 +5436,10 @@
             <a:tbl>
               <a:tblPr/>
               <a:tblGrid>
-                <a:gridCol w="3291840"/>
-                <a:gridCol w="7891272"/>
+                <a:gridCol w="914400"/>
+                <a:gridCol w="10268712"/>
               </a:tblGrid>
-              <a:tr h="548640">
+              <a:tr h="502920">
                 <a:tc>
                   <a:txBody>
                     <a:bodyPr/>
@@ -4555,7 +5457,7 @@
                           <a:ea typeface="Aptos Display" pitchFamily="34" charset="-122"/>
                           <a:cs typeface="Aptos Display" pitchFamily="34" charset="-120"/>
                         </a:rPr>
-                        <a:t>Agenda element</a:t>
+                        <a:t>#</a:t>
                       </a:r>
                       <a:endParaRPr lang="en-US" sz="1800" dirty="0">
                         <a:latin typeface="Aptos Display" charset="0"/>
@@ -4623,7 +5525,7 @@
                           <a:ea typeface="Aptos Display" pitchFamily="34" charset="-122"/>
                           <a:cs typeface="Aptos Display" pitchFamily="34" charset="-120"/>
                         </a:rPr>
-                        <a:t>What it does</a:t>
+                        <a:t>Agenda item</a:t>
                       </a:r>
                       <a:endParaRPr lang="en-US" sz="1800" dirty="0">
                         <a:latin typeface="Aptos Display" charset="0"/>
@@ -4675,7 +5577,7 @@
                   </a:tcPr>
                 </a:tc>
               </a:tr>
-              <a:tr h="548640">
+              <a:tr h="502920">
                 <a:tc>
                   <a:txBody>
                     <a:bodyPr/>
@@ -4693,7 +5595,7 @@
                           <a:ea typeface="Aptos" pitchFamily="34" charset="-122"/>
                           <a:cs typeface="Aptos" pitchFamily="34" charset="-120"/>
                         </a:rPr>
-                        <a:t>Purpose &amp; outcomes</a:t>
+                        <a:t>1</a:t>
                       </a:r>
                       <a:endParaRPr lang="en-US" sz="1800" dirty="0">
                         <a:latin typeface="Aptos" charset="0"/>
@@ -4761,7 +5663,7 @@
                           <a:ea typeface="Aptos" pitchFamily="34" charset="-122"/>
                           <a:cs typeface="Aptos" pitchFamily="34" charset="-120"/>
                         </a:rPr>
-                        <a:t>States why the meeting is held and what it must achieve</a:t>
+                        <a:t>Additions to and approval of the agenda</a:t>
                       </a:r>
                       <a:endParaRPr lang="en-US" sz="1800" dirty="0">
                         <a:latin typeface="Aptos" charset="0"/>
@@ -4813,7 +5715,7 @@
                   </a:tcPr>
                 </a:tc>
               </a:tr>
-              <a:tr h="548640">
+              <a:tr h="502920">
                 <a:tc>
                   <a:txBody>
                     <a:bodyPr/>
@@ -4831,7 +5733,7 @@
                           <a:ea typeface="Aptos" pitchFamily="34" charset="-122"/>
                           <a:cs typeface="Aptos" pitchFamily="34" charset="-120"/>
                         </a:rPr>
-                        <a:t>Items in priority order</a:t>
+                        <a:t>2</a:t>
                       </a:r>
                       <a:endParaRPr lang="en-US" sz="1800" dirty="0">
                         <a:latin typeface="Aptos" charset="0"/>
@@ -4899,7 +5801,7 @@
                           <a:ea typeface="Aptos" pitchFamily="34" charset="-122"/>
                           <a:cs typeface="Aptos" pitchFamily="34" charset="-120"/>
                         </a:rPr>
-                        <a:t>Important and urgent topics first — minor items at the end</a:t>
+                        <a:t>Reading, corrections and approval of the previous meeting's minutes</a:t>
                       </a:r>
                       <a:endParaRPr lang="en-US" sz="1800" dirty="0">
                         <a:latin typeface="Aptos" charset="0"/>
@@ -4951,7 +5853,7 @@
                   </a:tcPr>
                 </a:tc>
               </a:tr>
-              <a:tr h="548640">
+              <a:tr h="502920">
                 <a:tc>
                   <a:txBody>
                     <a:bodyPr/>
@@ -4969,7 +5871,7 @@
                           <a:ea typeface="Aptos" pitchFamily="34" charset="-122"/>
                           <a:cs typeface="Aptos" pitchFamily="34" charset="-120"/>
                         </a:rPr>
-                        <a:t>Time per item</a:t>
+                        <a:t>3</a:t>
                       </a:r>
                       <a:endParaRPr lang="en-US" sz="1800" dirty="0">
                         <a:latin typeface="Aptos" charset="0"/>
@@ -5037,7 +5939,7 @@
                           <a:ea typeface="Aptos" pitchFamily="34" charset="-122"/>
                           <a:cs typeface="Aptos" pitchFamily="34" charset="-120"/>
                         </a:rPr>
-                        <a:t>Discussion time allocated according to importance and complexity</a:t>
+                        <a:t>Announcements and correspondence to be dealt with</a:t>
                       </a:r>
                       <a:endParaRPr lang="en-US" sz="1800" dirty="0">
                         <a:latin typeface="Aptos" charset="0"/>
@@ -5089,7 +5991,7 @@
                   </a:tcPr>
                 </a:tc>
               </a:tr>
-              <a:tr h="548640">
+              <a:tr h="502920">
                 <a:tc>
                   <a:txBody>
                     <a:bodyPr/>
@@ -5107,7 +6009,7 @@
                           <a:ea typeface="Aptos" pitchFamily="34" charset="-122"/>
                           <a:cs typeface="Aptos" pitchFamily="34" charset="-120"/>
                         </a:rPr>
-                        <a:t>Supporting documents</a:t>
+                        <a:t>4</a:t>
                       </a:r>
                       <a:endParaRPr lang="en-US" sz="1800" dirty="0">
                         <a:latin typeface="Aptos" charset="0"/>
@@ -5175,7 +6077,7 @@
                           <a:ea typeface="Aptos" pitchFamily="34" charset="-122"/>
                           <a:cs typeface="Aptos" pitchFamily="34" charset="-120"/>
                         </a:rPr>
-                        <a:t>Reports and designs attached so participants arrive prepared</a:t>
+                        <a:t>Treasurer's report</a:t>
                       </a:r>
                       <a:endParaRPr lang="en-US" sz="1800" dirty="0">
                         <a:latin typeface="Aptos" charset="0"/>
@@ -5227,7 +6129,7 @@
                   </a:tcPr>
                 </a:tc>
               </a:tr>
-              <a:tr h="548640">
+              <a:tr h="502920">
                 <a:tc>
                   <a:txBody>
                     <a:bodyPr/>
@@ -5245,7 +6147,7 @@
                           <a:ea typeface="Aptos" pitchFamily="34" charset="-122"/>
                           <a:cs typeface="Aptos" pitchFamily="34" charset="-120"/>
                         </a:rPr>
-                        <a:t>Roles</a:t>
+                        <a:t>5</a:t>
                       </a:r>
                       <a:endParaRPr lang="en-US" sz="1800" dirty="0">
                         <a:latin typeface="Aptos" charset="0"/>
@@ -5313,7 +6215,283 @@
                           <a:ea typeface="Aptos" pitchFamily="34" charset="-122"/>
                           <a:cs typeface="Aptos" pitchFamily="34" charset="-120"/>
                         </a:rPr>
-                        <a:t>Chairperson, note taker (with a technical background) and presenters</a:t>
+                        <a:t>Committee reports</a:t>
+                      </a:r>
+                      <a:endParaRPr lang="en-US" sz="1800" dirty="0">
+                        <a:latin typeface="Aptos" charset="0"/>
+                        <a:ea typeface="Aptos" charset="0"/>
+                        <a:cs typeface="Aptos" charset="0"/>
+                      </a:endParaRPr>
+                    </a:p>
+                  </a:txBody>
+                  <a:tcPr marL="82296" marR="82296" marT="82296" marB="82296" anchor="ctr">
+                    <a:lnL w="9525" cap="flat" cmpd="sng" algn="ctr">
+                      <a:solidFill>
+                        <a:srgbClr val="D5E3F2"/>
+                      </a:solidFill>
+                      <a:prstDash val="solid"/>
+                      <a:round/>
+                      <a:headEnd type="none" w="med" len="med"/>
+                      <a:tailEnd type="none" w="med" len="med"/>
+                    </a:lnL>
+                    <a:lnR w="9525" cap="flat" cmpd="sng" algn="ctr">
+                      <a:solidFill>
+                        <a:srgbClr val="D5E3F2"/>
+                      </a:solidFill>
+                      <a:prstDash val="solid"/>
+                      <a:round/>
+                      <a:headEnd type="none" w="med" len="med"/>
+                      <a:tailEnd type="none" w="med" len="med"/>
+                    </a:lnR>
+                    <a:lnT w="9525" cap="flat" cmpd="sng" algn="ctr">
+                      <a:solidFill>
+                        <a:srgbClr val="D5E3F2"/>
+                      </a:solidFill>
+                      <a:prstDash val="solid"/>
+                      <a:round/>
+                      <a:headEnd type="none" w="med" len="med"/>
+                      <a:tailEnd type="none" w="med" len="med"/>
+                    </a:lnT>
+                    <a:lnB w="9525" cap="flat" cmpd="sng" algn="ctr">
+                      <a:solidFill>
+                        <a:srgbClr val="D5E3F2"/>
+                      </a:solidFill>
+                      <a:prstDash val="solid"/>
+                      <a:round/>
+                      <a:headEnd type="none" w="med" len="med"/>
+                      <a:tailEnd type="none" w="med" len="med"/>
+                    </a:lnB>
+                    <a:solidFill>
+                      <a:srgbClr val="FFFFFF"/>
+                    </a:solidFill>
+                  </a:tcPr>
+                </a:tc>
+              </a:tr>
+              <a:tr h="502920">
+                <a:tc>
+                  <a:txBody>
+                    <a:bodyPr/>
+                    <a:lstStyle/>
+                    <a:p>
+                      <a:pPr indent="0" marL="0">
+                        <a:buNone/>
+                      </a:pPr>
+                      <a:r>
+                        <a:rPr lang="en-US" sz="1800" dirty="0">
+                          <a:solidFill>
+                            <a:srgbClr val="002050"/>
+                          </a:solidFill>
+                          <a:latin typeface="Aptos" pitchFamily="34" charset="0"/>
+                          <a:ea typeface="Aptos" pitchFamily="34" charset="-122"/>
+                          <a:cs typeface="Aptos" pitchFamily="34" charset="-120"/>
+                        </a:rPr>
+                        <a:t>6</a:t>
+                      </a:r>
+                      <a:endParaRPr lang="en-US" sz="1800" dirty="0">
+                        <a:latin typeface="Aptos" charset="0"/>
+                        <a:ea typeface="Aptos" charset="0"/>
+                        <a:cs typeface="Aptos" charset="0"/>
+                      </a:endParaRPr>
+                    </a:p>
+                  </a:txBody>
+                  <a:tcPr marL="82296" marR="82296" marT="82296" marB="82296" anchor="ctr">
+                    <a:lnL w="9525" cap="flat" cmpd="sng" algn="ctr">
+                      <a:solidFill>
+                        <a:srgbClr val="D5E3F2"/>
+                      </a:solidFill>
+                      <a:prstDash val="solid"/>
+                      <a:round/>
+                      <a:headEnd type="none" w="med" len="med"/>
+                      <a:tailEnd type="none" w="med" len="med"/>
+                    </a:lnL>
+                    <a:lnR w="9525" cap="flat" cmpd="sng" algn="ctr">
+                      <a:solidFill>
+                        <a:srgbClr val="D5E3F2"/>
+                      </a:solidFill>
+                      <a:prstDash val="solid"/>
+                      <a:round/>
+                      <a:headEnd type="none" w="med" len="med"/>
+                      <a:tailEnd type="none" w="med" len="med"/>
+                    </a:lnR>
+                    <a:lnT w="9525" cap="flat" cmpd="sng" algn="ctr">
+                      <a:solidFill>
+                        <a:srgbClr val="D5E3F2"/>
+                      </a:solidFill>
+                      <a:prstDash val="solid"/>
+                      <a:round/>
+                      <a:headEnd type="none" w="med" len="med"/>
+                      <a:tailEnd type="none" w="med" len="med"/>
+                    </a:lnT>
+                    <a:lnB w="9525" cap="flat" cmpd="sng" algn="ctr">
+                      <a:solidFill>
+                        <a:srgbClr val="D5E3F2"/>
+                      </a:solidFill>
+                      <a:prstDash val="solid"/>
+                      <a:round/>
+                      <a:headEnd type="none" w="med" len="med"/>
+                      <a:tailEnd type="none" w="med" len="med"/>
+                    </a:lnB>
+                    <a:solidFill>
+                      <a:srgbClr val="EAF4FF"/>
+                    </a:solidFill>
+                  </a:tcPr>
+                </a:tc>
+                <a:tc>
+                  <a:txBody>
+                    <a:bodyPr/>
+                    <a:lstStyle/>
+                    <a:p>
+                      <a:pPr indent="0" marL="0">
+                        <a:buNone/>
+                      </a:pPr>
+                      <a:r>
+                        <a:rPr lang="en-US" sz="1800" dirty="0">
+                          <a:solidFill>
+                            <a:srgbClr val="002050"/>
+                          </a:solidFill>
+                          <a:latin typeface="Aptos" pitchFamily="34" charset="0"/>
+                          <a:ea typeface="Aptos" pitchFamily="34" charset="-122"/>
+                          <a:cs typeface="Aptos" pitchFamily="34" charset="-120"/>
+                        </a:rPr>
+                        <a:t>Unfinished business — issues left over from previous meetings</a:t>
+                      </a:r>
+                      <a:endParaRPr lang="en-US" sz="1800" dirty="0">
+                        <a:latin typeface="Aptos" charset="0"/>
+                        <a:ea typeface="Aptos" charset="0"/>
+                        <a:cs typeface="Aptos" charset="0"/>
+                      </a:endParaRPr>
+                    </a:p>
+                  </a:txBody>
+                  <a:tcPr marL="82296" marR="82296" marT="82296" marB="82296" anchor="ctr">
+                    <a:lnL w="9525" cap="flat" cmpd="sng" algn="ctr">
+                      <a:solidFill>
+                        <a:srgbClr val="D5E3F2"/>
+                      </a:solidFill>
+                      <a:prstDash val="solid"/>
+                      <a:round/>
+                      <a:headEnd type="none" w="med" len="med"/>
+                      <a:tailEnd type="none" w="med" len="med"/>
+                    </a:lnL>
+                    <a:lnR w="9525" cap="flat" cmpd="sng" algn="ctr">
+                      <a:solidFill>
+                        <a:srgbClr val="D5E3F2"/>
+                      </a:solidFill>
+                      <a:prstDash val="solid"/>
+                      <a:round/>
+                      <a:headEnd type="none" w="med" len="med"/>
+                      <a:tailEnd type="none" w="med" len="med"/>
+                    </a:lnR>
+                    <a:lnT w="9525" cap="flat" cmpd="sng" algn="ctr">
+                      <a:solidFill>
+                        <a:srgbClr val="D5E3F2"/>
+                      </a:solidFill>
+                      <a:prstDash val="solid"/>
+                      <a:round/>
+                      <a:headEnd type="none" w="med" len="med"/>
+                      <a:tailEnd type="none" w="med" len="med"/>
+                    </a:lnT>
+                    <a:lnB w="9525" cap="flat" cmpd="sng" algn="ctr">
+                      <a:solidFill>
+                        <a:srgbClr val="D5E3F2"/>
+                      </a:solidFill>
+                      <a:prstDash val="solid"/>
+                      <a:round/>
+                      <a:headEnd type="none" w="med" len="med"/>
+                      <a:tailEnd type="none" w="med" len="med"/>
+                    </a:lnB>
+                    <a:solidFill>
+                      <a:srgbClr val="EAF4FF"/>
+                    </a:solidFill>
+                  </a:tcPr>
+                </a:tc>
+              </a:tr>
+              <a:tr h="502920">
+                <a:tc>
+                  <a:txBody>
+                    <a:bodyPr/>
+                    <a:lstStyle/>
+                    <a:p>
+                      <a:pPr indent="0" marL="0">
+                        <a:buNone/>
+                      </a:pPr>
+                      <a:r>
+                        <a:rPr lang="en-US" sz="1800" dirty="0">
+                          <a:solidFill>
+                            <a:srgbClr val="002050"/>
+                          </a:solidFill>
+                          <a:latin typeface="Aptos" pitchFamily="34" charset="0"/>
+                          <a:ea typeface="Aptos" pitchFamily="34" charset="-122"/>
+                          <a:cs typeface="Aptos" pitchFamily="34" charset="-120"/>
+                        </a:rPr>
+                        <a:t>7</a:t>
+                      </a:r>
+                      <a:endParaRPr lang="en-US" sz="1800" dirty="0">
+                        <a:latin typeface="Aptos" charset="0"/>
+                        <a:ea typeface="Aptos" charset="0"/>
+                        <a:cs typeface="Aptos" charset="0"/>
+                      </a:endParaRPr>
+                    </a:p>
+                  </a:txBody>
+                  <a:tcPr marL="82296" marR="82296" marT="82296" marB="82296" anchor="ctr">
+                    <a:lnL w="9525" cap="flat" cmpd="sng" algn="ctr">
+                      <a:solidFill>
+                        <a:srgbClr val="D5E3F2"/>
+                      </a:solidFill>
+                      <a:prstDash val="solid"/>
+                      <a:round/>
+                      <a:headEnd type="none" w="med" len="med"/>
+                      <a:tailEnd type="none" w="med" len="med"/>
+                    </a:lnL>
+                    <a:lnR w="9525" cap="flat" cmpd="sng" algn="ctr">
+                      <a:solidFill>
+                        <a:srgbClr val="D5E3F2"/>
+                      </a:solidFill>
+                      <a:prstDash val="solid"/>
+                      <a:round/>
+                      <a:headEnd type="none" w="med" len="med"/>
+                      <a:tailEnd type="none" w="med" len="med"/>
+                    </a:lnR>
+                    <a:lnT w="9525" cap="flat" cmpd="sng" algn="ctr">
+                      <a:solidFill>
+                        <a:srgbClr val="D5E3F2"/>
+                      </a:solidFill>
+                      <a:prstDash val="solid"/>
+                      <a:round/>
+                      <a:headEnd type="none" w="med" len="med"/>
+                      <a:tailEnd type="none" w="med" len="med"/>
+                    </a:lnT>
+                    <a:lnB w="9525" cap="flat" cmpd="sng" algn="ctr">
+                      <a:solidFill>
+                        <a:srgbClr val="D5E3F2"/>
+                      </a:solidFill>
+                      <a:prstDash val="solid"/>
+                      <a:round/>
+                      <a:headEnd type="none" w="med" len="med"/>
+                      <a:tailEnd type="none" w="med" len="med"/>
+                    </a:lnB>
+                    <a:solidFill>
+                      <a:srgbClr val="FFFFFF"/>
+                    </a:solidFill>
+                  </a:tcPr>
+                </a:tc>
+                <a:tc>
+                  <a:txBody>
+                    <a:bodyPr/>
+                    <a:lstStyle/>
+                    <a:p>
+                      <a:pPr indent="0" marL="0">
+                        <a:buNone/>
+                      </a:pPr>
+                      <a:r>
+                        <a:rPr lang="en-US" sz="1800" dirty="0">
+                          <a:solidFill>
+                            <a:srgbClr val="002050"/>
+                          </a:solidFill>
+                          <a:latin typeface="Aptos" pitchFamily="34" charset="0"/>
+                          <a:ea typeface="Aptos" pitchFamily="34" charset="-122"/>
+                          <a:cs typeface="Aptos" pitchFamily="34" charset="-120"/>
+                        </a:rPr>
+                        <a:t>New business — then General / Any Other Business</a:t>
                       </a:r>
                       <a:endParaRPr lang="en-US" sz="1800" dirty="0">
                         <a:latin typeface="Aptos" charset="0"/>
@@ -5377,9 +6555,9 @@
 </p:sld>
 </file>
 
-<file path=ppt/slides/slide6.xml><?xml version="1.0" encoding="utf-8"?>
+<file path=ppt/slides/slide8.xml><?xml version="1.0" encoding="utf-8"?>
 <p:sld xmlns:a="http://schemas.openxmlformats.org/drawingml/2006/main" xmlns:r="http://schemas.openxmlformats.org/officeDocument/2006/relationships" xmlns:p="http://schemas.openxmlformats.org/presentationml/2006/main">
-  <p:cSld name="Slide 6">
+  <p:cSld name="Slide 8">
     <p:bg>
       <p:bgPr>
         <a:solidFill>
@@ -5473,7 +6651,7 @@
                 <a:ea typeface="Aptos" pitchFamily="34" charset="-122"/>
                 <a:cs typeface="Aptos" pitchFamily="34" charset="-120"/>
               </a:rPr>
-              <a:t>6</a:t>
+              <a:t>8</a:t>
             </a:r>
             <a:endParaRPr lang="en-US" sz="1800" dirty="0"/>
           </a:p>
@@ -6029,9 +7207,9 @@
 </p:sld>
 </file>
 
-<file path=ppt/slides/slide7.xml><?xml version="1.0" encoding="utf-8"?>
+<file path=ppt/slides/slide9.xml><?xml version="1.0" encoding="utf-8"?>
 <p:sld xmlns:a="http://schemas.openxmlformats.org/drawingml/2006/main" xmlns:r="http://schemas.openxmlformats.org/officeDocument/2006/relationships" xmlns:p="http://schemas.openxmlformats.org/presentationml/2006/main">
-  <p:cSld name="Slide 7">
+  <p:cSld name="Slide 9">
     <p:bg>
       <p:bgPr>
         <a:solidFill>
@@ -6125,7 +7303,7 @@
                 <a:ea typeface="Aptos" pitchFamily="34" charset="-122"/>
                 <a:cs typeface="Aptos" pitchFamily="34" charset="-120"/>
               </a:rPr>
-              <a:t>7</a:t>
+              <a:t>9</a:t>
             </a:r>
             <a:endParaRPr lang="en-US" sz="1800" dirty="0"/>
           </a:p>
@@ -6276,7 +7454,7 @@
                 <a:ea typeface="Aptos" pitchFamily="34" charset="-122"/>
                 <a:cs typeface="Aptos" pitchFamily="34" charset="-120"/>
               </a:rPr>
-              <a:t>Venue » facilities » technology » supporting information » documented outcomes » timeous invitations » a distributed agenda — preparation turns meeting time into decision time.</a:t>
+              <a:t>Venue » facilities » technology » support information » outcomes outlined in the invitation » timeous notification » an agenda in priority order with time per item — preparation turns meeting time into decision time.</a:t>
             </a:r>
             <a:endParaRPr lang="en-US" sz="1800" dirty="0"/>
           </a:p>
